--- a/slide/9_Interpretation.pptx
+++ b/slide/9_Interpretation.pptx
@@ -139,7 +139,49 @@
       </a:defRPr>
     </a:lvl9pPr>
   </p:defaultTextStyle>
+  <p:extLst>
+    <p:ext uri="{EFAFB233-063F-42B5-8137-9DF3F51BA10A}">
+      <p15:sldGuideLst xmlns:p15="http://schemas.microsoft.com/office/powerpoint/2012/main"/>
+    </p:ext>
+  </p:extLst>
 </p:presentation>
+</file>
+
+<file path=ppt/revisionInfo.xml><?xml version="1.0" encoding="utf-8"?>
+<p1510:revInfo xmlns:a="http://schemas.openxmlformats.org/drawingml/2006/main" xmlns:r="http://schemas.openxmlformats.org/officeDocument/2006/relationships" xmlns:p1510="http://schemas.microsoft.com/office/powerpoint/2015/10/main">
+  <p1510:revLst>
+    <p1510:client id="{A83D9512-BB04-8340-A049-876E9A497927}" v="5" dt="2026-02-24T14:43:39.657"/>
+  </p1510:revLst>
+</p1510:revInfo>
+</file>
+
+<file path=ppt/changesInfos/changesInfo1.xml><?xml version="1.0" encoding="utf-8"?>
+<pc:chgInfo xmlns:a="http://schemas.openxmlformats.org/drawingml/2006/main" xmlns:r="http://schemas.openxmlformats.org/officeDocument/2006/relationships" xmlns:ac="http://schemas.microsoft.com/office/drawing/2013/main/command" xmlns:pc="http://schemas.microsoft.com/office/powerpoint/2013/main/command">
+  <pc:docChgLst>
+    <pc:chgData name="Sebastian Vallejo Vera" userId="661f42ee-5565-49c4-8b1d-325f2d699b91" providerId="ADAL" clId="{8C1EFA1F-0339-5164-815E-AFC004A65A72}"/>
+    <pc:docChg chg="modSld">
+      <pc:chgData name="Sebastian Vallejo Vera" userId="661f42ee-5565-49c4-8b1d-325f2d699b91" providerId="ADAL" clId="{8C1EFA1F-0339-5164-815E-AFC004A65A72}" dt="2026-02-24T14:43:39.657" v="4"/>
+      <pc:docMkLst>
+        <pc:docMk/>
+      </pc:docMkLst>
+      <pc:sldChg chg="modSp">
+        <pc:chgData name="Sebastian Vallejo Vera" userId="661f42ee-5565-49c4-8b1d-325f2d699b91" providerId="ADAL" clId="{8C1EFA1F-0339-5164-815E-AFC004A65A72}" dt="2026-02-24T14:43:39.657" v="4"/>
+        <pc:sldMkLst>
+          <pc:docMk/>
+          <pc:sldMk cId="3326795465" sldId="308"/>
+        </pc:sldMkLst>
+        <pc:spChg chg="mod">
+          <ac:chgData name="Sebastian Vallejo Vera" userId="661f42ee-5565-49c4-8b1d-325f2d699b91" providerId="ADAL" clId="{8C1EFA1F-0339-5164-815E-AFC004A65A72}" dt="2026-02-24T14:43:39.657" v="4"/>
+          <ac:spMkLst>
+            <pc:docMk/>
+            <pc:sldMk cId="3326795465" sldId="308"/>
+            <ac:spMk id="3" creationId="{AB97ADFB-698F-B260-CCB0-8585F1724738}"/>
+          </ac:spMkLst>
+        </pc:spChg>
+      </pc:sldChg>
+    </pc:docChg>
+  </pc:docChgLst>
+</pc:chgInfo>
 </file>
 
 <file path=ppt/ink/ink1.xml><?xml version="1.0" encoding="utf-8"?>
@@ -1833,7 +1875,7 @@
           <a:p>
             <a:fld id="{28E9B37F-137B-7349-9593-C7ACADB376A8}" type="datetimeFigureOut">
               <a:rPr lang="en-US" smtClean="0"/>
-              <a:t>3/4/24</a:t>
+              <a:t>2/24/26</a:t>
             </a:fld>
             <a:endParaRPr lang="en-US"/>
           </a:p>
@@ -2071,7 +2113,7 @@
           <a:p>
             <a:fld id="{28E9B37F-137B-7349-9593-C7ACADB376A8}" type="datetimeFigureOut">
               <a:rPr lang="en-US" smtClean="0"/>
-              <a:t>3/4/24</a:t>
+              <a:t>2/24/26</a:t>
             </a:fld>
             <a:endParaRPr lang="en-US"/>
           </a:p>
@@ -2251,7 +2293,7 @@
           <a:p>
             <a:fld id="{28E9B37F-137B-7349-9593-C7ACADB376A8}" type="datetimeFigureOut">
               <a:rPr lang="en-US" smtClean="0"/>
-              <a:t>3/4/24</a:t>
+              <a:t>2/24/26</a:t>
             </a:fld>
             <a:endParaRPr lang="en-US"/>
           </a:p>
@@ -2421,7 +2463,7 @@
           <a:p>
             <a:fld id="{28E9B37F-137B-7349-9593-C7ACADB376A8}" type="datetimeFigureOut">
               <a:rPr lang="en-US" smtClean="0"/>
-              <a:t>3/4/24</a:t>
+              <a:t>2/24/26</a:t>
             </a:fld>
             <a:endParaRPr lang="en-US"/>
           </a:p>
@@ -2697,7 +2739,7 @@
           <a:p>
             <a:fld id="{28E9B37F-137B-7349-9593-C7ACADB376A8}" type="datetimeFigureOut">
               <a:rPr lang="en-US" smtClean="0"/>
-              <a:t>3/4/24</a:t>
+              <a:t>2/24/26</a:t>
             </a:fld>
             <a:endParaRPr lang="en-US"/>
           </a:p>
@@ -3898,7 +3940,7 @@
           <a:p>
             <a:fld id="{28E9B37F-137B-7349-9593-C7ACADB376A8}" type="datetimeFigureOut">
               <a:rPr lang="en-US" smtClean="0"/>
-              <a:t>3/4/24</a:t>
+              <a:t>2/24/26</a:t>
             </a:fld>
             <a:endParaRPr lang="en-US"/>
           </a:p>
@@ -4288,7 +4330,7 @@
           <a:p>
             <a:fld id="{28E9B37F-137B-7349-9593-C7ACADB376A8}" type="datetimeFigureOut">
               <a:rPr lang="en-US" smtClean="0"/>
-              <a:t>3/4/24</a:t>
+              <a:t>2/24/26</a:t>
             </a:fld>
             <a:endParaRPr lang="en-US"/>
           </a:p>
@@ -4411,7 +4453,7 @@
           <a:p>
             <a:fld id="{28E9B37F-137B-7349-9593-C7ACADB376A8}" type="datetimeFigureOut">
               <a:rPr lang="en-US" smtClean="0"/>
-              <a:t>3/4/24</a:t>
+              <a:t>2/24/26</a:t>
             </a:fld>
             <a:endParaRPr lang="en-US"/>
           </a:p>
@@ -4506,7 +4548,7 @@
           <a:p>
             <a:fld id="{28E9B37F-137B-7349-9593-C7ACADB376A8}" type="datetimeFigureOut">
               <a:rPr lang="en-US" smtClean="0"/>
-              <a:t>3/4/24</a:t>
+              <a:t>2/24/26</a:t>
             </a:fld>
             <a:endParaRPr lang="en-US"/>
           </a:p>
@@ -5269,7 +5311,7 @@
           <a:p>
             <a:fld id="{28E9B37F-137B-7349-9593-C7ACADB376A8}" type="datetimeFigureOut">
               <a:rPr lang="en-US" smtClean="0"/>
-              <a:t>3/4/24</a:t>
+              <a:t>2/24/26</a:t>
             </a:fld>
             <a:endParaRPr lang="en-US"/>
           </a:p>
@@ -6109,7 +6151,7 @@
           <a:p>
             <a:fld id="{28E9B37F-137B-7349-9593-C7ACADB376A8}" type="datetimeFigureOut">
               <a:rPr lang="en-US" smtClean="0"/>
-              <a:t>3/4/24</a:t>
+              <a:t>2/24/26</a:t>
             </a:fld>
             <a:endParaRPr lang="en-US"/>
           </a:p>
@@ -6336,7 +6378,7 @@
           <a:p>
             <a:fld id="{28E9B37F-137B-7349-9593-C7ACADB376A8}" type="datetimeFigureOut">
               <a:rPr lang="en-US" smtClean="0"/>
-              <a:t>3/4/24</a:t>
+              <a:t>2/24/26</a:t>
             </a:fld>
             <a:endParaRPr lang="en-US"/>
           </a:p>
@@ -6885,6 +6927,13 @@
             <a:tailEnd/>
           </a:ln>
         </p:spPr>
+        <p:txBody>
+          <a:bodyPr/>
+          <a:lstStyle/>
+          <a:p>
+            <a:endParaRPr lang="en-US"/>
+          </a:p>
+        </p:txBody>
       </p:sp>
       <p:sp>
         <p:nvSpPr>
@@ -6923,6 +6972,13 @@
             <a:schemeClr val="lt1"/>
           </a:fontRef>
         </p:style>
+        <p:txBody>
+          <a:bodyPr/>
+          <a:lstStyle/>
+          <a:p>
+            <a:endParaRPr lang="en-US"/>
+          </a:p>
+        </p:txBody>
       </p:sp>
     </p:spTree>
     <p:extLst>
@@ -7455,8 +7511,8 @@
           </a:p>
         </p:txBody>
       </p:sp>
-      <mc:AlternateContent xmlns:mc="http://schemas.openxmlformats.org/markup-compatibility/2006">
-        <mc:Choice xmlns:a14="http://schemas.microsoft.com/office/drawing/2010/main" Requires="a14">
+      <mc:AlternateContent xmlns:mc="http://schemas.openxmlformats.org/markup-compatibility/2006" xmlns:a14="http://schemas.microsoft.com/office/drawing/2010/main">
+        <mc:Choice Requires="a14">
           <p:sp>
             <p:nvSpPr>
               <p:cNvPr id="3" name="Content Placeholder 2">
@@ -8036,7 +8092,7 @@
             </p:txBody>
           </p:sp>
         </mc:Choice>
-        <mc:Fallback>
+        <mc:Fallback xmlns="">
           <p:sp>
             <p:nvSpPr>
               <p:cNvPr id="3" name="Content Placeholder 2">
@@ -8131,8 +8187,8 @@
           </a:p>
         </p:txBody>
       </p:sp>
-      <mc:AlternateContent xmlns:mc="http://schemas.openxmlformats.org/markup-compatibility/2006">
-        <mc:Choice xmlns:a14="http://schemas.microsoft.com/office/drawing/2010/main" Requires="a14">
+      <mc:AlternateContent xmlns:mc="http://schemas.openxmlformats.org/markup-compatibility/2006" xmlns:a14="http://schemas.microsoft.com/office/drawing/2010/main">
+        <mc:Choice Requires="a14">
           <p:sp>
             <p:nvSpPr>
               <p:cNvPr id="5" name="Content Placeholder 4">
@@ -8447,7 +8503,7 @@
             </p:txBody>
           </p:sp>
         </mc:Choice>
-        <mc:Fallback>
+        <mc:Fallback xmlns="">
           <p:sp>
             <p:nvSpPr>
               <p:cNvPr id="5" name="Content Placeholder 4">
@@ -8847,13 +8903,38 @@
                   <a:rPr lang="en-US" dirty="0"/>
                   <a:t>Note: “the” appears in quotation marks because a more general form of the t statistic is needed for testing other hypotheses about </a:t>
                 </a:r>
-                <a:r>
-                  <a:rPr lang="el-GR" dirty="0"/>
-                  <a:t>β</a:t>
-                </a:r>
+                <a14:m>
+                  <m:oMath xmlns:m="http://schemas.openxmlformats.org/officeDocument/2006/math">
+                    <m:sSub>
+                      <m:sSubPr>
+                        <m:ctrlPr>
+                          <a:rPr lang="en-CA" b="0" i="1" dirty="0" smtClean="0">
+                            <a:latin typeface="Cambria Math" panose="02040503050406030204" pitchFamily="18" charset="0"/>
+                          </a:rPr>
+                        </m:ctrlPr>
+                      </m:sSubPr>
+                      <m:e>
+                        <m:r>
+                          <a:rPr lang="el-GR" i="1" dirty="0" smtClean="0">
+                            <a:latin typeface="Cambria Math" panose="02040503050406030204" pitchFamily="18" charset="0"/>
+                          </a:rPr>
+                          <m:t>𝛽</m:t>
+                        </m:r>
+                      </m:e>
+                      <m:sub>
+                        <m:r>
+                          <a:rPr lang="en-CA" b="0" i="1" dirty="0" smtClean="0">
+                            <a:latin typeface="Cambria Math" panose="02040503050406030204" pitchFamily="18" charset="0"/>
+                          </a:rPr>
+                          <m:t>𝑗</m:t>
+                        </m:r>
+                      </m:sub>
+                    </m:sSub>
+                  </m:oMath>
+                </a14:m>
                 <a:r>
                   <a:rPr lang="en-US" dirty="0"/>
-                  <a:t>j (next time). </a:t>
+                  <a:t>(next time). </a:t>
                 </a:r>
               </a:p>
               <a:p>
@@ -9534,8 +9615,8 @@
           </a:p>
         </p:txBody>
       </p:sp>
-      <mc:AlternateContent xmlns:mc="http://schemas.openxmlformats.org/markup-compatibility/2006">
-        <mc:Choice xmlns:a14="http://schemas.microsoft.com/office/drawing/2010/main" Requires="a14">
+      <mc:AlternateContent xmlns:mc="http://schemas.openxmlformats.org/markup-compatibility/2006" xmlns:a14="http://schemas.microsoft.com/office/drawing/2010/main">
+        <mc:Choice Requires="a14">
           <p:sp>
             <p:nvSpPr>
               <p:cNvPr id="3" name="Content Placeholder 2">
@@ -10308,7 +10389,7 @@
             </p:txBody>
           </p:sp>
         </mc:Choice>
-        <mc:Fallback>
+        <mc:Fallback xmlns="">
           <p:sp>
             <p:nvSpPr>
               <p:cNvPr id="3" name="Content Placeholder 2">
@@ -10403,8 +10484,8 @@
           </a:p>
         </p:txBody>
       </p:sp>
-      <mc:AlternateContent xmlns:mc="http://schemas.openxmlformats.org/markup-compatibility/2006">
-        <mc:Choice xmlns:a14="http://schemas.microsoft.com/office/drawing/2010/main" Requires="a14">
+      <mc:AlternateContent xmlns:mc="http://schemas.openxmlformats.org/markup-compatibility/2006" xmlns:a14="http://schemas.microsoft.com/office/drawing/2010/main">
+        <mc:Choice Requires="a14">
           <p:sp>
             <p:nvSpPr>
               <p:cNvPr id="3" name="Content Placeholder 2">
@@ -10800,14 +10881,7 @@
                             <a:latin typeface="Cambria Math" panose="02040503050406030204" pitchFamily="18" charset="0"/>
                             <a:ea typeface="Cambria Math" panose="02040503050406030204" pitchFamily="18" charset="0"/>
                           </a:rPr>
-                          <m:t>+</m:t>
-                        </m:r>
-                        <m:r>
-                          <a:rPr lang="en-CA" b="0" i="1" smtClean="0">
-                            <a:latin typeface="Cambria Math" panose="02040503050406030204" pitchFamily="18" charset="0"/>
-                            <a:ea typeface="Cambria Math" panose="02040503050406030204" pitchFamily="18" charset="0"/>
-                          </a:rPr>
-                          <m:t>1)</m:t>
+                          <m:t>+1)</m:t>
                         </m:r>
                       </m:sub>
                     </m:sSub>
@@ -10894,7 +10968,7 @@
             </p:txBody>
           </p:sp>
         </mc:Choice>
-        <mc:Fallback>
+        <mc:Fallback xmlns="">
           <p:sp>
             <p:nvSpPr>
               <p:cNvPr id="3" name="Content Placeholder 2">
@@ -10989,8 +11063,8 @@
           </a:p>
         </p:txBody>
       </p:sp>
-      <mc:AlternateContent xmlns:mc="http://schemas.openxmlformats.org/markup-compatibility/2006">
-        <mc:Choice xmlns:a14="http://schemas.microsoft.com/office/drawing/2010/main" Requires="a14">
+      <mc:AlternateContent xmlns:mc="http://schemas.openxmlformats.org/markup-compatibility/2006" xmlns:a14="http://schemas.microsoft.com/office/drawing/2010/main">
+        <mc:Choice Requires="a14">
           <p:sp>
             <p:nvSpPr>
               <p:cNvPr id="3" name="Content Placeholder 2">
@@ -11579,14 +11653,7 @@
                         <a:latin typeface="Cambria Math" panose="02040503050406030204" pitchFamily="18" charset="0"/>
                         <a:ea typeface="Cambria Math" panose="02040503050406030204" pitchFamily="18" charset="0"/>
                       </a:rPr>
-                      <m:t>&gt;</m:t>
-                    </m:r>
-                    <m:r>
-                      <a:rPr lang="en-CA" i="1">
-                        <a:latin typeface="Cambria Math" panose="02040503050406030204" pitchFamily="18" charset="0"/>
-                        <a:ea typeface="Cambria Math" panose="02040503050406030204" pitchFamily="18" charset="0"/>
-                      </a:rPr>
-                      <m:t>0</m:t>
+                      <m:t>&gt;0</m:t>
                     </m:r>
                   </m:oMath>
                 </a14:m>
@@ -11696,7 +11763,7 @@
             </p:txBody>
           </p:sp>
         </mc:Choice>
-        <mc:Fallback>
+        <mc:Fallback xmlns="">
           <p:sp>
             <p:nvSpPr>
               <p:cNvPr id="3" name="Content Placeholder 2">
@@ -11791,8 +11858,8 @@
           </a:p>
         </p:txBody>
       </p:sp>
-      <mc:AlternateContent xmlns:mc="http://schemas.openxmlformats.org/markup-compatibility/2006">
-        <mc:Choice xmlns:a14="http://schemas.microsoft.com/office/drawing/2010/main" Requires="a14">
+      <mc:AlternateContent xmlns:mc="http://schemas.openxmlformats.org/markup-compatibility/2006" xmlns:a14="http://schemas.microsoft.com/office/drawing/2010/main">
+        <mc:Choice Requires="a14">
           <p:sp>
             <p:nvSpPr>
               <p:cNvPr id="3" name="Content Placeholder 2">
@@ -12073,7 +12140,7 @@
             </p:txBody>
           </p:sp>
         </mc:Choice>
-        <mc:Fallback>
+        <mc:Fallback xmlns="">
           <p:sp>
             <p:nvSpPr>
               <p:cNvPr id="3" name="Content Placeholder 2">
@@ -12189,8 +12256,8 @@
           </a:extLst>
         </p:spPr>
       </p:pic>
-      <mc:AlternateContent xmlns:mc="http://schemas.openxmlformats.org/markup-compatibility/2006">
-        <mc:Choice xmlns:p14="http://schemas.microsoft.com/office/powerpoint/2010/main" Requires="p14">
+      <mc:AlternateContent xmlns:mc="http://schemas.openxmlformats.org/markup-compatibility/2006" xmlns:p14="http://schemas.microsoft.com/office/powerpoint/2010/main">
+        <mc:Choice Requires="p14">
           <p:contentPart p14:bwMode="auto" r:id="rId3">
             <p14:nvContentPartPr>
               <p14:cNvPr id="2" name="Ink 1">
@@ -12209,7 +12276,7 @@
             </p14:xfrm>
           </p:contentPart>
         </mc:Choice>
-        <mc:Fallback>
+        <mc:Fallback xmlns="">
           <p:pic>
             <p:nvPicPr>
               <p:cNvPr id="2" name="Ink 1">
@@ -12240,8 +12307,8 @@
           </p:pic>
         </mc:Fallback>
       </mc:AlternateContent>
-      <mc:AlternateContent xmlns:mc="http://schemas.openxmlformats.org/markup-compatibility/2006">
-        <mc:Choice xmlns:p14="http://schemas.microsoft.com/office/powerpoint/2010/main" Requires="p14">
+      <mc:AlternateContent xmlns:mc="http://schemas.openxmlformats.org/markup-compatibility/2006" xmlns:p14="http://schemas.microsoft.com/office/powerpoint/2010/main">
+        <mc:Choice Requires="p14">
           <p:contentPart p14:bwMode="auto" r:id="rId5">
             <p14:nvContentPartPr>
               <p14:cNvPr id="3" name="Ink 2">
@@ -12260,7 +12327,7 @@
             </p14:xfrm>
           </p:contentPart>
         </mc:Choice>
-        <mc:Fallback>
+        <mc:Fallback xmlns="">
           <p:pic>
             <p:nvPicPr>
               <p:cNvPr id="3" name="Ink 2">
@@ -12291,8 +12358,8 @@
           </p:pic>
         </mc:Fallback>
       </mc:AlternateContent>
-      <mc:AlternateContent xmlns:mc="http://schemas.openxmlformats.org/markup-compatibility/2006">
-        <mc:Choice xmlns:p14="http://schemas.microsoft.com/office/powerpoint/2010/main" Requires="p14">
+      <mc:AlternateContent xmlns:mc="http://schemas.openxmlformats.org/markup-compatibility/2006" xmlns:p14="http://schemas.microsoft.com/office/powerpoint/2010/main">
+        <mc:Choice Requires="p14">
           <p:contentPart p14:bwMode="auto" r:id="rId7">
             <p14:nvContentPartPr>
               <p14:cNvPr id="4" name="Ink 3">
@@ -12311,7 +12378,7 @@
             </p14:xfrm>
           </p:contentPart>
         </mc:Choice>
-        <mc:Fallback>
+        <mc:Fallback xmlns="">
           <p:pic>
             <p:nvPicPr>
               <p:cNvPr id="4" name="Ink 3">
@@ -12678,8 +12745,8 @@
           </a:p>
         </p:txBody>
       </p:sp>
-      <mc:AlternateContent xmlns:mc="http://schemas.openxmlformats.org/markup-compatibility/2006">
-        <mc:Choice xmlns:a14="http://schemas.microsoft.com/office/drawing/2010/main" Requires="a14">
+      <mc:AlternateContent xmlns:mc="http://schemas.openxmlformats.org/markup-compatibility/2006" xmlns:a14="http://schemas.microsoft.com/office/drawing/2010/main">
+        <mc:Choice Requires="a14">
           <p:sp>
             <p:nvSpPr>
               <p:cNvPr id="3" name="Content Placeholder 2">
@@ -12949,14 +13016,7 @@
                         <a:latin typeface="Cambria Math" panose="02040503050406030204" pitchFamily="18" charset="0"/>
                         <a:ea typeface="Cambria Math" panose="02040503050406030204" pitchFamily="18" charset="0"/>
                       </a:rPr>
-                      <m:t>&gt;</m:t>
-                    </m:r>
-                    <m:r>
-                      <a:rPr lang="en-CA" i="1">
-                        <a:latin typeface="Cambria Math" panose="02040503050406030204" pitchFamily="18" charset="0"/>
-                        <a:ea typeface="Cambria Math" panose="02040503050406030204" pitchFamily="18" charset="0"/>
-                      </a:rPr>
-                      <m:t>0 </m:t>
+                      <m:t>&gt;0 </m:t>
                     </m:r>
                   </m:oMath>
                 </a14:m>
@@ -13061,7 +13121,7 @@
             </p:txBody>
           </p:sp>
         </mc:Choice>
-        <mc:Fallback>
+        <mc:Fallback xmlns="">
           <p:sp>
             <p:nvSpPr>
               <p:cNvPr id="3" name="Content Placeholder 2">
@@ -13314,8 +13374,8 @@
           </a:extLst>
         </p:spPr>
       </p:pic>
-      <mc:AlternateContent xmlns:mc="http://schemas.openxmlformats.org/markup-compatibility/2006">
-        <mc:Choice xmlns:p14="http://schemas.microsoft.com/office/powerpoint/2010/main" Requires="p14">
+      <mc:AlternateContent xmlns:mc="http://schemas.openxmlformats.org/markup-compatibility/2006" xmlns:p14="http://schemas.microsoft.com/office/powerpoint/2010/main">
+        <mc:Choice Requires="p14">
           <p:contentPart p14:bwMode="auto" r:id="rId3">
             <p14:nvContentPartPr>
               <p14:cNvPr id="4" name="Ink 3">
@@ -13334,7 +13394,7 @@
             </p14:xfrm>
           </p:contentPart>
         </mc:Choice>
-        <mc:Fallback>
+        <mc:Fallback xmlns="">
           <p:pic>
             <p:nvPicPr>
               <p:cNvPr id="4" name="Ink 3">
@@ -13365,8 +13425,8 @@
           </p:pic>
         </mc:Fallback>
       </mc:AlternateContent>
-      <mc:AlternateContent xmlns:mc="http://schemas.openxmlformats.org/markup-compatibility/2006">
-        <mc:Choice xmlns:p14="http://schemas.microsoft.com/office/powerpoint/2010/main" Requires="p14">
+      <mc:AlternateContent xmlns:mc="http://schemas.openxmlformats.org/markup-compatibility/2006" xmlns:p14="http://schemas.microsoft.com/office/powerpoint/2010/main">
+        <mc:Choice Requires="p14">
           <p:contentPart p14:bwMode="auto" r:id="rId5">
             <p14:nvContentPartPr>
               <p14:cNvPr id="5" name="Ink 4">
@@ -13385,7 +13445,7 @@
             </p14:xfrm>
           </p:contentPart>
         </mc:Choice>
-        <mc:Fallback>
+        <mc:Fallback xmlns="">
           <p:pic>
             <p:nvPicPr>
               <p:cNvPr id="5" name="Ink 4">
@@ -13416,8 +13476,8 @@
           </p:pic>
         </mc:Fallback>
       </mc:AlternateContent>
-      <mc:AlternateContent xmlns:mc="http://schemas.openxmlformats.org/markup-compatibility/2006">
-        <mc:Choice xmlns:p14="http://schemas.microsoft.com/office/powerpoint/2010/main" Requires="p14">
+      <mc:AlternateContent xmlns:mc="http://schemas.openxmlformats.org/markup-compatibility/2006" xmlns:p14="http://schemas.microsoft.com/office/powerpoint/2010/main">
+        <mc:Choice Requires="p14">
           <p:contentPart p14:bwMode="auto" r:id="rId7">
             <p14:nvContentPartPr>
               <p14:cNvPr id="6" name="Ink 5">
@@ -13436,7 +13496,7 @@
             </p14:xfrm>
           </p:contentPart>
         </mc:Choice>
-        <mc:Fallback>
+        <mc:Fallback xmlns="">
           <p:pic>
             <p:nvPicPr>
               <p:cNvPr id="6" name="Ink 5">
@@ -13716,8 +13776,8 @@
           </a:p>
         </p:txBody>
       </p:sp>
-      <mc:AlternateContent xmlns:mc="http://schemas.openxmlformats.org/markup-compatibility/2006">
-        <mc:Choice xmlns:a14="http://schemas.microsoft.com/office/drawing/2010/main" Requires="a14">
+      <mc:AlternateContent xmlns:mc="http://schemas.openxmlformats.org/markup-compatibility/2006" xmlns:a14="http://schemas.microsoft.com/office/drawing/2010/main">
+        <mc:Choice Requires="a14">
           <p:sp>
             <p:nvSpPr>
               <p:cNvPr id="3" name="Content Placeholder 2">
@@ -14197,7 +14257,7 @@
             </p:txBody>
           </p:sp>
         </mc:Choice>
-        <mc:Fallback>
+        <mc:Fallback xmlns="">
           <p:sp>
             <p:nvSpPr>
               <p:cNvPr id="3" name="Content Placeholder 2">
@@ -14450,8 +14510,8 @@
           </a:extLst>
         </p:spPr>
       </p:pic>
-      <mc:AlternateContent xmlns:mc="http://schemas.openxmlformats.org/markup-compatibility/2006">
-        <mc:Choice xmlns:p14="http://schemas.microsoft.com/office/powerpoint/2010/main" Requires="p14">
+      <mc:AlternateContent xmlns:mc="http://schemas.openxmlformats.org/markup-compatibility/2006" xmlns:p14="http://schemas.microsoft.com/office/powerpoint/2010/main">
+        <mc:Choice Requires="p14">
           <p:contentPart p14:bwMode="auto" r:id="rId3">
             <p14:nvContentPartPr>
               <p14:cNvPr id="2" name="Ink 1">
@@ -14470,7 +14530,7 @@
             </p14:xfrm>
           </p:contentPart>
         </mc:Choice>
-        <mc:Fallback>
+        <mc:Fallback xmlns="">
           <p:pic>
             <p:nvPicPr>
               <p:cNvPr id="2" name="Ink 1">
@@ -14501,8 +14561,8 @@
           </p:pic>
         </mc:Fallback>
       </mc:AlternateContent>
-      <mc:AlternateContent xmlns:mc="http://schemas.openxmlformats.org/markup-compatibility/2006">
-        <mc:Choice xmlns:p14="http://schemas.microsoft.com/office/powerpoint/2010/main" Requires="p14">
+      <mc:AlternateContent xmlns:mc="http://schemas.openxmlformats.org/markup-compatibility/2006" xmlns:p14="http://schemas.microsoft.com/office/powerpoint/2010/main">
+        <mc:Choice Requires="p14">
           <p:contentPart p14:bwMode="auto" r:id="rId5">
             <p14:nvContentPartPr>
               <p14:cNvPr id="3" name="Ink 2">
@@ -14521,7 +14581,7 @@
             </p14:xfrm>
           </p:contentPart>
         </mc:Choice>
-        <mc:Fallback>
+        <mc:Fallback xmlns="">
           <p:pic>
             <p:nvPicPr>
               <p:cNvPr id="3" name="Ink 2">
@@ -14801,8 +14861,8 @@
           </a:p>
         </p:txBody>
       </p:sp>
-      <mc:AlternateContent xmlns:mc="http://schemas.openxmlformats.org/markup-compatibility/2006">
-        <mc:Choice xmlns:a14="http://schemas.microsoft.com/office/drawing/2010/main" Requires="a14">
+      <mc:AlternateContent xmlns:mc="http://schemas.openxmlformats.org/markup-compatibility/2006" xmlns:a14="http://schemas.microsoft.com/office/drawing/2010/main">
+        <mc:Choice Requires="a14">
           <p:sp>
             <p:nvSpPr>
               <p:cNvPr id="3" name="Content Placeholder 2">
@@ -15090,7 +15150,7 @@
             </p:txBody>
           </p:sp>
         </mc:Choice>
-        <mc:Fallback>
+        <mc:Fallback xmlns="">
           <p:sp>
             <p:nvSpPr>
               <p:cNvPr id="3" name="Content Placeholder 2">
@@ -15185,8 +15245,8 @@
           </a:p>
         </p:txBody>
       </p:sp>
-      <mc:AlternateContent xmlns:mc="http://schemas.openxmlformats.org/markup-compatibility/2006">
-        <mc:Choice xmlns:a14="http://schemas.microsoft.com/office/drawing/2010/main" Requires="a14">
+      <mc:AlternateContent xmlns:mc="http://schemas.openxmlformats.org/markup-compatibility/2006" xmlns:a14="http://schemas.microsoft.com/office/drawing/2010/main">
+        <mc:Choice Requires="a14">
           <p:sp>
             <p:nvSpPr>
               <p:cNvPr id="3" name="Content Placeholder 2">
@@ -15992,7 +16052,7 @@
             </p:txBody>
           </p:sp>
         </mc:Choice>
-        <mc:Fallback>
+        <mc:Fallback xmlns="">
           <p:sp>
             <p:nvSpPr>
               <p:cNvPr id="3" name="Content Placeholder 2">
@@ -16179,8 +16239,8 @@
           </a:p>
         </p:txBody>
       </p:sp>
-      <mc:AlternateContent xmlns:mc="http://schemas.openxmlformats.org/markup-compatibility/2006">
-        <mc:Choice xmlns:a14="http://schemas.microsoft.com/office/drawing/2010/main" Requires="a14">
+      <mc:AlternateContent xmlns:mc="http://schemas.openxmlformats.org/markup-compatibility/2006" xmlns:a14="http://schemas.microsoft.com/office/drawing/2010/main">
+        <mc:Choice Requires="a14">
           <p:sp>
             <p:nvSpPr>
               <p:cNvPr id="3" name="Content Placeholder 2">
@@ -16436,7 +16496,7 @@
             </p:txBody>
           </p:sp>
         </mc:Choice>
-        <mc:Fallback>
+        <mc:Fallback xmlns="">
           <p:sp>
             <p:nvSpPr>
               <p:cNvPr id="3" name="Content Placeholder 2">
@@ -16531,8 +16591,8 @@
           </a:p>
         </p:txBody>
       </p:sp>
-      <mc:AlternateContent xmlns:mc="http://schemas.openxmlformats.org/markup-compatibility/2006">
-        <mc:Choice xmlns:a14="http://schemas.microsoft.com/office/drawing/2010/main" Requires="a14">
+      <mc:AlternateContent xmlns:mc="http://schemas.openxmlformats.org/markup-compatibility/2006" xmlns:a14="http://schemas.microsoft.com/office/drawing/2010/main">
+        <mc:Choice Requires="a14">
           <p:sp>
             <p:nvSpPr>
               <p:cNvPr id="3" name="Content Placeholder 2">
@@ -16627,7 +16687,7 @@
             </p:txBody>
           </p:sp>
         </mc:Choice>
-        <mc:Fallback>
+        <mc:Fallback xmlns="">
           <p:sp>
             <p:nvSpPr>
               <p:cNvPr id="3" name="Content Placeholder 2">
@@ -16725,8 +16785,8 @@
           </a:p>
         </p:txBody>
       </p:sp>
-      <mc:AlternateContent xmlns:mc="http://schemas.openxmlformats.org/markup-compatibility/2006">
-        <mc:Choice xmlns:a14="http://schemas.microsoft.com/office/drawing/2010/main" Requires="a14">
+      <mc:AlternateContent xmlns:mc="http://schemas.openxmlformats.org/markup-compatibility/2006" xmlns:a14="http://schemas.microsoft.com/office/drawing/2010/main">
+        <mc:Choice Requires="a14">
           <p:sp>
             <p:nvSpPr>
               <p:cNvPr id="5" name="Content Placeholder 4">
@@ -16924,7 +16984,7 @@
             </p:txBody>
           </p:sp>
         </mc:Choice>
-        <mc:Fallback>
+        <mc:Fallback xmlns="">
           <p:sp>
             <p:nvSpPr>
               <p:cNvPr id="5" name="Content Placeholder 4">
@@ -17321,8 +17381,8 @@
           </a:p>
         </p:txBody>
       </p:sp>
-      <mc:AlternateContent xmlns:mc="http://schemas.openxmlformats.org/markup-compatibility/2006">
-        <mc:Choice xmlns:a14="http://schemas.microsoft.com/office/drawing/2010/main" Requires="a14">
+      <mc:AlternateContent xmlns:mc="http://schemas.openxmlformats.org/markup-compatibility/2006" xmlns:a14="http://schemas.microsoft.com/office/drawing/2010/main">
+        <mc:Choice Requires="a14">
           <p:sp>
             <p:nvSpPr>
               <p:cNvPr id="5" name="Content Placeholder 4">
@@ -17540,7 +17600,7 @@
             </p:txBody>
           </p:sp>
         </mc:Choice>
-        <mc:Fallback>
+        <mc:Fallback xmlns="">
           <p:sp>
             <p:nvSpPr>
               <p:cNvPr id="5" name="Content Placeholder 4">
@@ -19317,8 +19377,8 @@
           </a:p>
         </p:txBody>
       </p:sp>
-      <mc:AlternateContent xmlns:mc="http://schemas.openxmlformats.org/markup-compatibility/2006">
-        <mc:Choice xmlns:a14="http://schemas.microsoft.com/office/drawing/2010/main" Requires="a14">
+      <mc:AlternateContent xmlns:mc="http://schemas.openxmlformats.org/markup-compatibility/2006" xmlns:a14="http://schemas.microsoft.com/office/drawing/2010/main">
+        <mc:Choice Requires="a14">
           <p:sp>
             <p:nvSpPr>
               <p:cNvPr id="3" name="Content Placeholder 2">
@@ -19711,7 +19771,7 @@
             </p:txBody>
           </p:sp>
         </mc:Choice>
-        <mc:Fallback>
+        <mc:Fallback xmlns="">
           <p:sp>
             <p:nvSpPr>
               <p:cNvPr id="3" name="Content Placeholder 2">
@@ -19771,8 +19831,8 @@
             <a:chExt cx="515880" cy="1768680"/>
           </a:xfrm>
         </p:grpSpPr>
-        <mc:AlternateContent xmlns:mc="http://schemas.openxmlformats.org/markup-compatibility/2006">
-          <mc:Choice xmlns:p14="http://schemas.microsoft.com/office/powerpoint/2010/main" xmlns:aink="http://schemas.microsoft.com/office/drawing/2016/ink" Requires="p14 aink">
+        <mc:AlternateContent xmlns:mc="http://schemas.openxmlformats.org/markup-compatibility/2006" xmlns:p14="http://schemas.microsoft.com/office/powerpoint/2010/main" xmlns:aink="http://schemas.microsoft.com/office/drawing/2016/ink">
+          <mc:Choice Requires="p14 aink">
             <p:contentPart p14:bwMode="auto" r:id="rId3">
               <p14:nvContentPartPr>
                 <p14:cNvPr id="4" name="Ink 3">
@@ -19791,7 +19851,7 @@
               </p14:xfrm>
             </p:contentPart>
           </mc:Choice>
-          <mc:Fallback>
+          <mc:Fallback xmlns="">
             <p:pic>
               <p:nvPicPr>
                 <p:cNvPr id="4" name="Ink 3">
@@ -19822,8 +19882,8 @@
             </p:pic>
           </mc:Fallback>
         </mc:AlternateContent>
-        <mc:AlternateContent xmlns:mc="http://schemas.openxmlformats.org/markup-compatibility/2006">
-          <mc:Choice xmlns:p14="http://schemas.microsoft.com/office/powerpoint/2010/main" xmlns:aink="http://schemas.microsoft.com/office/drawing/2016/ink" Requires="p14 aink">
+        <mc:AlternateContent xmlns:mc="http://schemas.openxmlformats.org/markup-compatibility/2006" xmlns:p14="http://schemas.microsoft.com/office/powerpoint/2010/main" xmlns:aink="http://schemas.microsoft.com/office/drawing/2016/ink">
+          <mc:Choice Requires="p14 aink">
             <p:contentPart p14:bwMode="auto" r:id="rId5">
               <p14:nvContentPartPr>
                 <p14:cNvPr id="5" name="Ink 4">
@@ -19842,7 +19902,7 @@
               </p14:xfrm>
             </p:contentPart>
           </mc:Choice>
-          <mc:Fallback>
+          <mc:Fallback xmlns="">
             <p:pic>
               <p:nvPicPr>
                 <p:cNvPr id="5" name="Ink 4">
@@ -19873,8 +19933,8 @@
             </p:pic>
           </mc:Fallback>
         </mc:AlternateContent>
-        <mc:AlternateContent xmlns:mc="http://schemas.openxmlformats.org/markup-compatibility/2006">
-          <mc:Choice xmlns:p14="http://schemas.microsoft.com/office/powerpoint/2010/main" xmlns:aink="http://schemas.microsoft.com/office/drawing/2016/ink" Requires="p14 aink">
+        <mc:AlternateContent xmlns:mc="http://schemas.openxmlformats.org/markup-compatibility/2006" xmlns:p14="http://schemas.microsoft.com/office/powerpoint/2010/main" xmlns:aink="http://schemas.microsoft.com/office/drawing/2016/ink">
+          <mc:Choice Requires="p14 aink">
             <p:contentPart p14:bwMode="auto" r:id="rId7">
               <p14:nvContentPartPr>
                 <p14:cNvPr id="7" name="Ink 6">
@@ -19893,7 +19953,7 @@
               </p14:xfrm>
             </p:contentPart>
           </mc:Choice>
-          <mc:Fallback>
+          <mc:Fallback xmlns="">
             <p:pic>
               <p:nvPicPr>
                 <p:cNvPr id="7" name="Ink 6">
@@ -19925,8 +19985,8 @@
           </mc:Fallback>
         </mc:AlternateContent>
       </p:grpSp>
-      <mc:AlternateContent xmlns:mc="http://schemas.openxmlformats.org/markup-compatibility/2006">
-        <mc:Choice xmlns:p14="http://schemas.microsoft.com/office/powerpoint/2010/main" xmlns:aink="http://schemas.microsoft.com/office/drawing/2016/ink" Requires="p14 aink">
+      <mc:AlternateContent xmlns:mc="http://schemas.openxmlformats.org/markup-compatibility/2006" xmlns:p14="http://schemas.microsoft.com/office/powerpoint/2010/main" xmlns:aink="http://schemas.microsoft.com/office/drawing/2016/ink">
+        <mc:Choice Requires="p14 aink">
           <p:contentPart p14:bwMode="auto" r:id="rId9">
             <p14:nvContentPartPr>
               <p14:cNvPr id="11" name="Ink 10">
@@ -19945,7 +20005,7 @@
             </p14:xfrm>
           </p:contentPart>
         </mc:Choice>
-        <mc:Fallback>
+        <mc:Fallback xmlns="">
           <p:pic>
             <p:nvPicPr>
               <p:cNvPr id="11" name="Ink 10">
@@ -20477,8 +20537,8 @@
           </a:p>
         </p:txBody>
       </p:sp>
-      <mc:AlternateContent xmlns:mc="http://schemas.openxmlformats.org/markup-compatibility/2006">
-        <mc:Choice xmlns:a14="http://schemas.microsoft.com/office/drawing/2010/main" Requires="a14">
+      <mc:AlternateContent xmlns:mc="http://schemas.openxmlformats.org/markup-compatibility/2006" xmlns:a14="http://schemas.microsoft.com/office/drawing/2010/main">
+        <mc:Choice Requires="a14">
           <p:sp>
             <p:nvSpPr>
               <p:cNvPr id="3" name="Content Placeholder 2">
@@ -20599,7 +20659,7 @@
             </p:txBody>
           </p:sp>
         </mc:Choice>
-        <mc:Fallback>
+        <mc:Fallback xmlns="">
           <p:sp>
             <p:nvSpPr>
               <p:cNvPr id="3" name="Content Placeholder 2">
@@ -20697,8 +20757,8 @@
           </a:p>
         </p:txBody>
       </p:sp>
-      <mc:AlternateContent xmlns:mc="http://schemas.openxmlformats.org/markup-compatibility/2006">
-        <mc:Choice xmlns:a14="http://schemas.microsoft.com/office/drawing/2010/main" Requires="a14">
+      <mc:AlternateContent xmlns:mc="http://schemas.openxmlformats.org/markup-compatibility/2006" xmlns:a14="http://schemas.microsoft.com/office/drawing/2010/main">
+        <mc:Choice Requires="a14">
           <p:sp>
             <p:nvSpPr>
               <p:cNvPr id="3" name="Content Placeholder 2">
@@ -21313,14 +21373,7 @@
                           <a:latin typeface="Cambria Math" panose="02040503050406030204" pitchFamily="18" charset="0"/>
                           <a:ea typeface="Cambria Math" panose="02040503050406030204" pitchFamily="18" charset="0"/>
                         </a:rPr>
-                        <m:t>(</m:t>
-                      </m:r>
-                      <m:r>
-                        <a:rPr lang="en-CA" i="1">
-                          <a:latin typeface="Cambria Math" panose="02040503050406030204" pitchFamily="18" charset="0"/>
-                          <a:ea typeface="Cambria Math" panose="02040503050406030204" pitchFamily="18" charset="0"/>
-                        </a:rPr>
-                        <m:t>0,</m:t>
+                        <m:t>(0,</m:t>
                       </m:r>
                       <m:sSup>
                         <m:sSupPr>
@@ -21361,7 +21414,7 @@
             </p:txBody>
           </p:sp>
         </mc:Choice>
-        <mc:Fallback>
+        <mc:Fallback xmlns="">
           <p:sp>
             <p:nvSpPr>
               <p:cNvPr id="3" name="Content Placeholder 2">
@@ -21421,8 +21474,8 @@
             <a:chExt cx="905040" cy="1479600"/>
           </a:xfrm>
         </p:grpSpPr>
-        <mc:AlternateContent xmlns:mc="http://schemas.openxmlformats.org/markup-compatibility/2006">
-          <mc:Choice xmlns:p14="http://schemas.microsoft.com/office/powerpoint/2010/main" xmlns:aink="http://schemas.microsoft.com/office/drawing/2016/ink" Requires="p14 aink">
+        <mc:AlternateContent xmlns:mc="http://schemas.openxmlformats.org/markup-compatibility/2006" xmlns:p14="http://schemas.microsoft.com/office/powerpoint/2010/main" xmlns:aink="http://schemas.microsoft.com/office/drawing/2016/ink">
+          <mc:Choice Requires="p14 aink">
             <p:contentPart p14:bwMode="auto" r:id="rId3">
               <p14:nvContentPartPr>
                 <p14:cNvPr id="4" name="Ink 3">
@@ -21441,7 +21494,7 @@
               </p14:xfrm>
             </p:contentPart>
           </mc:Choice>
-          <mc:Fallback>
+          <mc:Fallback xmlns="">
             <p:pic>
               <p:nvPicPr>
                 <p:cNvPr id="4" name="Ink 3">
@@ -21472,8 +21525,8 @@
             </p:pic>
           </mc:Fallback>
         </mc:AlternateContent>
-        <mc:AlternateContent xmlns:mc="http://schemas.openxmlformats.org/markup-compatibility/2006">
-          <mc:Choice xmlns:p14="http://schemas.microsoft.com/office/powerpoint/2010/main" xmlns:aink="http://schemas.microsoft.com/office/drawing/2016/ink" Requires="p14 aink">
+        <mc:AlternateContent xmlns:mc="http://schemas.openxmlformats.org/markup-compatibility/2006" xmlns:p14="http://schemas.microsoft.com/office/powerpoint/2010/main" xmlns:aink="http://schemas.microsoft.com/office/drawing/2016/ink">
+          <mc:Choice Requires="p14 aink">
             <p:contentPart p14:bwMode="auto" r:id="rId5">
               <p14:nvContentPartPr>
                 <p14:cNvPr id="5" name="Ink 4">
@@ -21492,7 +21545,7 @@
               </p14:xfrm>
             </p:contentPart>
           </mc:Choice>
-          <mc:Fallback>
+          <mc:Fallback xmlns="">
             <p:pic>
               <p:nvPicPr>
                 <p:cNvPr id="5" name="Ink 4">
@@ -21524,8 +21577,8 @@
           </mc:Fallback>
         </mc:AlternateContent>
       </p:grpSp>
-      <mc:AlternateContent xmlns:mc="http://schemas.openxmlformats.org/markup-compatibility/2006">
-        <mc:Choice xmlns:a14="http://schemas.microsoft.com/office/drawing/2010/main" Requires="a14">
+      <mc:AlternateContent xmlns:mc="http://schemas.openxmlformats.org/markup-compatibility/2006" xmlns:a14="http://schemas.microsoft.com/office/drawing/2010/main">
+        <mc:Choice Requires="a14">
           <p:sp>
             <p:nvSpPr>
               <p:cNvPr id="7" name="TextBox 6">
@@ -21619,7 +21672,7 @@
             </p:txBody>
           </p:sp>
         </mc:Choice>
-        <mc:Fallback>
+        <mc:Fallback xmlns="">
           <p:sp>
             <p:nvSpPr>
               <p:cNvPr id="7" name="TextBox 6">
@@ -21684,8 +21737,8 @@
             <a:chExt cx="1054800" cy="540720"/>
           </a:xfrm>
         </p:grpSpPr>
-        <mc:AlternateContent xmlns:mc="http://schemas.openxmlformats.org/markup-compatibility/2006">
-          <mc:Choice xmlns:p14="http://schemas.microsoft.com/office/powerpoint/2010/main" xmlns:aink="http://schemas.microsoft.com/office/drawing/2016/ink" Requires="p14 aink">
+        <mc:AlternateContent xmlns:mc="http://schemas.openxmlformats.org/markup-compatibility/2006" xmlns:p14="http://schemas.microsoft.com/office/powerpoint/2010/main" xmlns:aink="http://schemas.microsoft.com/office/drawing/2016/ink">
+          <mc:Choice Requires="p14 aink">
             <p:contentPart p14:bwMode="auto" r:id="rId8">
               <p14:nvContentPartPr>
                 <p14:cNvPr id="8" name="Ink 7">
@@ -21704,7 +21757,7 @@
               </p14:xfrm>
             </p:contentPart>
           </mc:Choice>
-          <mc:Fallback>
+          <mc:Fallback xmlns="">
             <p:pic>
               <p:nvPicPr>
                 <p:cNvPr id="8" name="Ink 7">
@@ -21735,8 +21788,8 @@
             </p:pic>
           </mc:Fallback>
         </mc:AlternateContent>
-        <mc:AlternateContent xmlns:mc="http://schemas.openxmlformats.org/markup-compatibility/2006">
-          <mc:Choice xmlns:p14="http://schemas.microsoft.com/office/powerpoint/2010/main" xmlns:aink="http://schemas.microsoft.com/office/drawing/2016/ink" Requires="p14 aink">
+        <mc:AlternateContent xmlns:mc="http://schemas.openxmlformats.org/markup-compatibility/2006" xmlns:p14="http://schemas.microsoft.com/office/powerpoint/2010/main" xmlns:aink="http://schemas.microsoft.com/office/drawing/2016/ink">
+          <mc:Choice Requires="p14 aink">
             <p:contentPart p14:bwMode="auto" r:id="rId10">
               <p14:nvContentPartPr>
                 <p14:cNvPr id="9" name="Ink 8">
@@ -21755,7 +21808,7 @@
               </p14:xfrm>
             </p:contentPart>
           </mc:Choice>
-          <mc:Fallback>
+          <mc:Fallback xmlns="">
             <p:pic>
               <p:nvPicPr>
                 <p:cNvPr id="9" name="Ink 8">
@@ -21787,8 +21840,8 @@
           </mc:Fallback>
         </mc:AlternateContent>
       </p:grpSp>
-      <mc:AlternateContent xmlns:mc="http://schemas.openxmlformats.org/markup-compatibility/2006">
-        <mc:Choice xmlns:a14="http://schemas.microsoft.com/office/drawing/2010/main" Requires="a14">
+      <mc:AlternateContent xmlns:mc="http://schemas.openxmlformats.org/markup-compatibility/2006" xmlns:a14="http://schemas.microsoft.com/office/drawing/2010/main">
+        <mc:Choice Requires="a14">
           <p:sp>
             <p:nvSpPr>
               <p:cNvPr id="11" name="TextBox 10">
@@ -21862,7 +21915,7 @@
             </p:txBody>
           </p:sp>
         </mc:Choice>
-        <mc:Fallback>
+        <mc:Fallback xmlns="">
           <p:sp>
             <p:nvSpPr>
               <p:cNvPr id="11" name="TextBox 10">
@@ -22140,8 +22193,8 @@
           </a:p>
         </p:txBody>
       </p:sp>
-      <mc:AlternateContent xmlns:mc="http://schemas.openxmlformats.org/markup-compatibility/2006">
-        <mc:Choice xmlns:a14="http://schemas.microsoft.com/office/drawing/2010/main" Requires="a14">
+      <mc:AlternateContent xmlns:mc="http://schemas.openxmlformats.org/markup-compatibility/2006" xmlns:a14="http://schemas.microsoft.com/office/drawing/2010/main">
+        <mc:Choice Requires="a14">
           <p:sp>
             <p:nvSpPr>
               <p:cNvPr id="3" name="Content Placeholder 2">
@@ -22572,7 +22625,7 @@
             </p:txBody>
           </p:sp>
         </mc:Choice>
-        <mc:Fallback>
+        <mc:Fallback xmlns="">
           <p:sp>
             <p:nvSpPr>
               <p:cNvPr id="3" name="Content Placeholder 2">
@@ -22670,8 +22723,8 @@
           </a:p>
         </p:txBody>
       </p:sp>
-      <mc:AlternateContent xmlns:mc="http://schemas.openxmlformats.org/markup-compatibility/2006">
-        <mc:Choice xmlns:a14="http://schemas.microsoft.com/office/drawing/2010/main" Requires="a14">
+      <mc:AlternateContent xmlns:mc="http://schemas.openxmlformats.org/markup-compatibility/2006" xmlns:a14="http://schemas.microsoft.com/office/drawing/2010/main">
+        <mc:Choice Requires="a14">
           <p:sp>
             <p:nvSpPr>
               <p:cNvPr id="3" name="Content Placeholder 2">
@@ -22814,14 +22867,7 @@
                               <a:latin typeface="Cambria Math" panose="02040503050406030204" pitchFamily="18" charset="0"/>
                               <a:ea typeface="Cambria Math" panose="02040503050406030204" pitchFamily="18" charset="0"/>
                             </a:rPr>
-                            <m:t>𝑠</m:t>
-                          </m:r>
-                          <m:r>
-                            <a:rPr lang="en-CA" b="0" i="1" smtClean="0">
-                              <a:latin typeface="Cambria Math" panose="02040503050406030204" pitchFamily="18" charset="0"/>
-                              <a:ea typeface="Cambria Math" panose="02040503050406030204" pitchFamily="18" charset="0"/>
-                            </a:rPr>
-                            <m:t>𝑒</m:t>
+                            <m:t>𝑠𝑒</m:t>
                           </m:r>
                           <m:d>
                             <m:dPr>
@@ -23257,7 +23303,7 @@
             </p:txBody>
           </p:sp>
         </mc:Choice>
-        <mc:Fallback>
+        <mc:Fallback xmlns="">
           <p:sp>
             <p:nvSpPr>
               <p:cNvPr id="3" name="Content Placeholder 2">
